--- a/decks/less-cringe-more-connection-lesson-v2.pptx
+++ b/decks/less-cringe-more-connection-lesson-v2.pptx
@@ -20,7 +20,6 @@
     <p:sldId id="268" r:id="rId20"/>
     <p:sldId id="269" r:id="rId21"/>
     <p:sldId id="270" r:id="rId22"/>
-    <p:sldId id="271" r:id="rId23"/>
   </p:sldIdLst>
   <p:sldSz cx="12192000" cy="6858000" type="screen4x3"/>
   <p:notesSz cx="6858000" cy="9144000"/>
@@ -587,7 +586,7 @@
           <a:lstStyle/>
           <a:p>
             <a:r>
-              <a:t>5 MINUTES. Ask five volunteers to play ninth graders and hand each a role card quietly: the critic, the shrugger, the expert, the joker, and the one who actually wants to talk. Tell two of them, privately, to also keep drifting into side conversations or sneaking a look at a phone or laptop. Pick a topic the room suggests, or use a grade talk they all know (the vaping talk works well). Lead with only the openers and the five questions. When the side-talkers drift, pull them back in by name with a real question ("Jordan, you've been quiet over there. Would you buy that?") rather than a reprimand. Keep it real, including a moment where it goes flat and you bring it back. Afterward ask: "What did you see me do?" and "Where would you have done it differently?"</a:t>
+              <a:t>10 MINUTES. Two ways to run it; pick what fits the room. Whole group: read one or two scenarios aloud and talk them through together. Small groups: send clusters of about six to different spots around the room and give each one a scenario card; in a big group, two clusters can share a card. Talk it through for about six minutes: How would you open? What would you say next? Which idea from today fits: one of the five ways in, a short story, rolling with pushback or quiet, the floor? Pick one person to share. Bring everyone back for four minutes and hear one idea from each cluster, or as many as time allows. Walk between clusters and listen. For the phones in “Nothing,” the move from the talk is pulling students back in by name with a real question (“Jordan, would you buy that?”) rather than a reprimand. “Something heavy” rehearses the floor: thank them, keep it short in the group, check in after, and a counselor hears about it that day.</a:t>
             </a:r>
           </a:p>
         </p:txBody>
@@ -657,7 +656,7 @@
           <a:lstStyle/>
           <a:p>
             <a:r>
-              <a:t>10 MINUTES. Each leader picks a topic: something in the news, something going on at school, or the last grade talk. Three minutes per round, one minute after each to name one thing that worked. Rotate so everyone leads once. Any two players can add the side-talker card on top of their role. Optional fifth card: "The quiet one with something real," who mentions near the end that something at home is hard. That's a rehearsal of the safety floor: thank them, keep it short in the group, check in after.</a:t>
+              <a:t>3 MINUTES. The floor never changes, whatever the topic. The right column is the permission advisors need. Advisory doesn't need to teach the content. Your job is to find out what they think and to stay the adult they can come back to.</a:t>
             </a:r>
           </a:p>
         </p:txBody>
@@ -683,76 +682,6 @@
 </file>
 
 <file path=ppt/notesSlides/notesSlide12.xml><?xml version="1.0" encoding="utf-8"?>
-<p:notes xmlns:a="http://schemas.openxmlformats.org/drawingml/2006/main" xmlns:p="http://schemas.openxmlformats.org/presentationml/2006/main" xmlns:r="http://schemas.openxmlformats.org/officeDocument/2006/relationships">
-  <p:cSld>
-    <p:spTree>
-      <p:nvGrpSpPr>
-        <p:cNvPr id="1" name=""/>
-        <p:cNvGrpSpPr/>
-        <p:nvPr/>
-      </p:nvGrpSpPr>
-      <p:grpSpPr>
-        <a:xfrm>
-          <a:off x="0" y="0"/>
-          <a:ext cx="0" cy="0"/>
-          <a:chOff x="0" y="0"/>
-          <a:chExt cx="0" cy="0"/>
-        </a:xfrm>
-      </p:grpSpPr>
-      <p:sp>
-        <p:nvSpPr>
-          <p:cNvPr id="2" name="Slide Image Placeholder 1"/>
-          <p:cNvSpPr>
-            <a:spLocks noGrp="1"/>
-          </p:cNvSpPr>
-          <p:nvPr>
-            <p:ph type="sldImg" idx="2"/>
-          </p:nvPr>
-        </p:nvSpPr>
-        <p:spPr/>
-      </p:sp>
-      <p:sp>
-        <p:nvSpPr>
-          <p:cNvPr id="3" name="Notes Placeholder 2"/>
-          <p:cNvSpPr>
-            <a:spLocks noGrp="1"/>
-          </p:cNvSpPr>
-          <p:nvPr>
-            <p:ph type="body" idx="3" sz="quarter"/>
-          </p:nvPr>
-        </p:nvSpPr>
-        <p:spPr/>
-        <p:txBody>
-          <a:bodyPr/>
-          <a:lstStyle/>
-          <a:p>
-            <a:r>
-              <a:t>3 MINUTES. The floor never changes, whatever the topic. The right column is the permission advisors need. Advisory doesn't need to teach the content. Your job is to find out what they think and to stay the adult they can come back to.</a:t>
-            </a:r>
-          </a:p>
-        </p:txBody>
-      </p:sp>
-      <p:sp>
-        <p:nvSpPr>
-          <p:cNvPr id="4" name="Slide Number Placeholder 3"/>
-          <p:cNvSpPr>
-            <a:spLocks noGrp="1"/>
-          </p:cNvSpPr>
-          <p:nvPr>
-            <p:ph type="sldNum" idx="5" sz="quarter"/>
-          </p:nvPr>
-        </p:nvSpPr>
-        <p:spPr/>
-      </p:sp>
-    </p:spTree>
-  </p:cSld>
-  <p:clrMapOvr>
-    <a:masterClrMapping/>
-  </p:clrMapOvr>
-</p:notes>
-</file>
-
-<file path=ppt/notesSlides/notesSlide13.xml><?xml version="1.0" encoding="utf-8"?>
 <p:notes xmlns:a="http://schemas.openxmlformats.org/drawingml/2006/main" xmlns:p="http://schemas.openxmlformats.org/presentationml/2006/main" xmlns:r="http://schemas.openxmlformats.org/officeDocument/2006/relationships">
   <p:cSld>
     <p:spTree>
@@ -4527,7 +4456,7 @@
                 </a:solidFill>
                 <a:latin typeface="Inter Tight"/>
               </a:rPr>
-              <a:t>Faculty professional development  ·  45 minutes (20-minute version below)  ·  Led by counseling  ·  Upper School faculty</a:t>
+              <a:t>Faculty professional development  ·  40 minutes (20-minute version below)  ·  Led by counseling  ·  Upper School faculty</a:t>
             </a:r>
           </a:p>
         </p:txBody>
@@ -4582,7 +4511,7 @@
                 </a:solidFill>
                 <a:latin typeface="Source Serif 4"/>
               </a:rPr>
-              <a:t>Advisors leave ready to lead a real conversation with their advisory group of seven or eight on any topic: something in the news, something going on at school, a question students raised, or the day after a grade talk. They practice opening with what students think, helping them zero in on one thing, rolling with pushback and quiet, and what to do if something heavy comes up. The relationship carries the conversation.</a:t>
+              <a:t>Advisors leave ready to lead a real conversation with their advisory group of seven or eight on any topic: something in the news, something going on at school, a question students raised, or the day after a grade talk. They work on opening with what students think, helping them zero in on one thing, rolling with pushback and quiet, and what to do if something heavy comes up. The relationship carries the conversation.</a:t>
             </a:r>
           </a:p>
           <a:p>
@@ -4630,7 +4559,7 @@
                 </a:solidFill>
                 <a:latin typeface="Source Serif 4"/>
               </a:rPr>
-              <a:t>Role cards for the practice round, one set per group of five</a:t>
+              <a:t>Scenario cards if you break into clusters, one per cluster (the four on the slide)</a:t>
             </a:r>
           </a:p>
           <a:p>
@@ -4826,7 +4755,7 @@
                 </a:solidFill>
                 <a:latin typeface="Inter Tight"/>
               </a:rPr>
-              <a:t>5 min   </a:t>
+              <a:t>10 min   </a:t>
             </a:r>
             <a:r>
               <a:rPr sz="1400" b="0" i="0">
@@ -4835,7 +4764,7 @@
                 </a:solidFill>
                 <a:latin typeface="Source Serif 4"/>
               </a:rPr>
-              <a:t>Watch one: a five-minute fishbowl</a:t>
+              <a:t>Your turn: talk through real scenarios, as a whole group or in clusters</a:t>
             </a:r>
           </a:p>
           <a:p>
@@ -4851,7 +4780,7 @@
                 </a:solidFill>
                 <a:latin typeface="Inter Tight"/>
               </a:rPr>
-              <a:t>10 min   </a:t>
+              <a:t>3 min   </a:t>
             </a:r>
             <a:r>
               <a:rPr sz="1400" b="0" i="0">
@@ -4860,7 +4789,7 @@
                 </a:solidFill>
                 <a:latin typeface="Source Serif 4"/>
               </a:rPr>
-              <a:t>Your turn: practice with role cards</a:t>
+              <a:t>If something heavy comes up, and one thing to try</a:t>
             </a:r>
           </a:p>
           <a:p>
@@ -4870,14 +4799,37 @@
               </a:spcAft>
             </a:pPr>
             <a:r>
-              <a:rPr sz="1300" b="1" i="0">
-                <a:solidFill>
-                  <a:srgbClr val="F47B20"/>
+              <a:rPr sz="1400" b="0" i="0">
+                <a:solidFill>
+                  <a:srgbClr val="1C1B19"/>
+                </a:solidFill>
+                <a:latin typeface="Source Serif 4"/>
+              </a:rPr>
+              <a:t/>
+            </a:r>
+          </a:p>
+          <a:p>
+            <a:pPr algn="l">
+              <a:spcAft>
+                <a:spcPts val="630"/>
+              </a:spcAft>
+            </a:pPr>
+            <a:r>
+              <a:rPr sz="1100" b="1" i="0">
+                <a:solidFill>
+                  <a:srgbClr val="0B2D5B"/>
                 </a:solidFill>
                 <a:latin typeface="Inter Tight"/>
               </a:rPr>
-              <a:t>3 min   </a:t>
-            </a:r>
+              <a:t>SHORT ON TIME (20-MINUTE ADVISORY)</a:t>
+            </a:r>
+          </a:p>
+          <a:p>
+            <a:pPr algn="l">
+              <a:spcAft>
+                <a:spcPts val="630"/>
+              </a:spcAft>
+            </a:pPr>
             <a:r>
               <a:rPr sz="1400" b="0" i="0">
                 <a:solidFill>
@@ -4885,55 +4837,7 @@
                 </a:solidFill>
                 <a:latin typeface="Source Serif 4"/>
               </a:rPr>
-              <a:t>If something heavy comes up, and one thing to try</a:t>
-            </a:r>
-          </a:p>
-          <a:p>
-            <a:pPr algn="l">
-              <a:spcAft>
-                <a:spcPts val="630"/>
-              </a:spcAft>
-            </a:pPr>
-            <a:r>
-              <a:rPr sz="1400" b="0" i="0">
-                <a:solidFill>
-                  <a:srgbClr val="1C1B19"/>
-                </a:solidFill>
-                <a:latin typeface="Source Serif 4"/>
-              </a:rPr>
-              <a:t/>
-            </a:r>
-          </a:p>
-          <a:p>
-            <a:pPr algn="l">
-              <a:spcAft>
-                <a:spcPts val="630"/>
-              </a:spcAft>
-            </a:pPr>
-            <a:r>
-              <a:rPr sz="1100" b="1" i="0">
-                <a:solidFill>
-                  <a:srgbClr val="0B2D5B"/>
-                </a:solidFill>
-                <a:latin typeface="Inter Tight"/>
-              </a:rPr>
-              <a:t>SHORT ON TIME (20-MINUTE ADVISORY)</a:t>
-            </a:r>
-          </a:p>
-          <a:p>
-            <a:pPr algn="l">
-              <a:spcAft>
-                <a:spcPts val="630"/>
-              </a:spcAft>
-            </a:pPr>
-            <a:r>
-              <a:rPr sz="1400" b="0" i="0">
-                <a:solidFill>
-                  <a:srgbClr val="1C1B19"/>
-                </a:solidFill>
-                <a:latin typeface="Source Serif 4"/>
-              </a:rPr>
-              <a:t>Twenty minutes: the opening, both prompts (4), why scripts flop, first slide only (3), five ways in (3), roll with it (4), one practice round (4), one thing to try (2).</a:t>
+              <a:t>Twenty minutes: the opening, both prompts (4), why scripts flop, first slide only (3), five ways in (3), roll with it (3), clusters, one scenario (5), one thing to try (2).</a:t>
             </a:r>
           </a:p>
         </p:txBody>
@@ -6408,7 +6312,7 @@
                 </a:solidFill>
                 <a:latin typeface="Inter Tight"/>
               </a:rPr>
-              <a:t>WATCH ONE</a:t>
+              <a:t>YOUR TURN</a:t>
             </a:r>
           </a:p>
         </p:txBody>
@@ -6460,47 +6364,8 @@
         </p:nvSpPr>
         <p:spPr>
           <a:xfrm>
-            <a:off x="822960" y="1463040"/>
-            <a:ext cx="10515600" cy="3291840"/>
-          </a:xfrm>
-          <a:prstGeom prst="rect">
-            <a:avLst/>
-          </a:prstGeom>
-          <a:noFill/>
-        </p:spPr>
-        <p:txBody>
-          <a:bodyPr wrap="square" anchor="ctr" lIns="0" rIns="0" tIns="0" bIns="0">
-            <a:spAutoFit/>
-          </a:bodyPr>
-          <a:lstStyle/>
-          <a:p>
-            <a:pPr algn="l">
-              <a:spcAft>
-                <a:spcPts val="2070"/>
-              </a:spcAft>
-            </a:pPr>
-            <a:r>
-              <a:rPr sz="4600" b="1" i="0">
-                <a:solidFill>
-                  <a:srgbClr val="1C1B19"/>
-                </a:solidFill>
-                <a:latin typeface="Source Serif 4"/>
-              </a:rPr>
-              <a:t>Five minutes. Five ninth graders. Any topic.</a:t>
-            </a:r>
-          </a:p>
-        </p:txBody>
-      </p:sp>
-      <p:sp>
-        <p:nvSpPr>
-          <p:cNvPr id="6" name="TextBox 5"/>
-          <p:cNvSpPr txBox="1"/>
-          <p:nvPr/>
-        </p:nvSpPr>
-        <p:spPr>
-          <a:xfrm>
-            <a:off x="822960" y="4846320"/>
-            <a:ext cx="10515600" cy="1097280"/>
+            <a:off x="822960" y="1005840"/>
+            <a:ext cx="10515600" cy="914400"/>
           </a:xfrm>
           <a:prstGeom prst="rect">
             <a:avLst/>
@@ -6515,17 +6380,513 @@
           <a:p>
             <a:pPr algn="l">
               <a:spcAft>
-                <a:spcPts val="990"/>
-              </a:spcAft>
-            </a:pPr>
-            <a:r>
-              <a:rPr sz="2200" b="0" i="1">
-                <a:solidFill>
-                  <a:srgbClr val="5D5A54"/>
+                <a:spcPts val="1530"/>
+              </a:spcAft>
+            </a:pPr>
+            <a:r>
+              <a:rPr sz="3400" b="1" i="0">
+                <a:solidFill>
+                  <a:srgbClr val="1C1B19"/>
                 </a:solidFill>
                 <a:latin typeface="Source Serif 4"/>
               </a:rPr>
-              <a:t>Watch for what the adult does. Then tell us.</a:t>
+              <a:t>Take a scenario. How would you handle it?</a:t>
+            </a:r>
+          </a:p>
+        </p:txBody>
+      </p:sp>
+      <p:sp>
+        <p:nvSpPr>
+          <p:cNvPr id="6" name="Rectangle 5"/>
+          <p:cNvSpPr/>
+          <p:nvPr/>
+        </p:nvSpPr>
+        <p:spPr>
+          <a:xfrm>
+            <a:off x="822960" y="2103120"/>
+            <a:ext cx="2423160" cy="3840480"/>
+          </a:xfrm>
+          <a:prstGeom prst="rect">
+            <a:avLst/>
+          </a:prstGeom>
+          <a:solidFill>
+            <a:srgbClr val="FFFFFF"/>
+          </a:solidFill>
+          <a:ln w="15875">
+            <a:solidFill>
+              <a:srgbClr val="D8D2C6"/>
+            </a:solidFill>
+          </a:ln>
+          <a:effectLst/>
+        </p:spPr>
+        <p:style>
+          <a:lnRef idx="1">
+            <a:schemeClr val="accent1"/>
+          </a:lnRef>
+          <a:fillRef idx="3">
+            <a:schemeClr val="accent1"/>
+          </a:fillRef>
+          <a:effectRef idx="2">
+            <a:schemeClr val="accent1"/>
+          </a:effectRef>
+          <a:fontRef idx="minor">
+            <a:schemeClr val="lt1"/>
+          </a:fontRef>
+        </p:style>
+        <p:txBody>
+          <a:bodyPr rtlCol="0" anchor="ctr"/>
+          <a:lstStyle/>
+          <a:p>
+            <a:pPr algn="ctr"/>
+          </a:p>
+        </p:txBody>
+      </p:sp>
+      <p:sp>
+        <p:nvSpPr>
+          <p:cNvPr id="7" name="TextBox 6"/>
+          <p:cNvSpPr txBox="1"/>
+          <p:nvPr/>
+        </p:nvSpPr>
+        <p:spPr>
+          <a:xfrm>
+            <a:off x="1051560" y="2286000"/>
+            <a:ext cx="1965960" cy="365760"/>
+          </a:xfrm>
+          <a:prstGeom prst="rect">
+            <a:avLst/>
+          </a:prstGeom>
+          <a:noFill/>
+        </p:spPr>
+        <p:txBody>
+          <a:bodyPr wrap="square" anchor="t" lIns="0" rIns="0" tIns="0" bIns="0">
+            <a:spAutoFit/>
+          </a:bodyPr>
+          <a:lstStyle/>
+          <a:p>
+            <a:pPr algn="l">
+              <a:spcAft>
+                <a:spcPts val="585"/>
+              </a:spcAft>
+            </a:pPr>
+            <a:r>
+              <a:rPr sz="1300" b="1" i="0">
+                <a:solidFill>
+                  <a:srgbClr val="0B2D5B"/>
+                </a:solidFill>
+                <a:latin typeface="Inter Tight"/>
+              </a:rPr>
+              <a:t>THE COMPLAINT</a:t>
+            </a:r>
+          </a:p>
+        </p:txBody>
+      </p:sp>
+      <p:sp>
+        <p:nvSpPr>
+          <p:cNvPr id="8" name="TextBox 7"/>
+          <p:cNvSpPr txBox="1"/>
+          <p:nvPr/>
+        </p:nvSpPr>
+        <p:spPr>
+          <a:xfrm>
+            <a:off x="1051560" y="2743200"/>
+            <a:ext cx="1965960" cy="3017520"/>
+          </a:xfrm>
+          <a:prstGeom prst="rect">
+            <a:avLst/>
+          </a:prstGeom>
+          <a:noFill/>
+        </p:spPr>
+        <p:txBody>
+          <a:bodyPr wrap="square" anchor="t" lIns="0" rIns="0" tIns="0" bIns="0">
+            <a:spAutoFit/>
+          </a:bodyPr>
+          <a:lstStyle/>
+          <a:p>
+            <a:pPr algn="l">
+              <a:spcAft>
+                <a:spcPts val="810"/>
+              </a:spcAft>
+            </a:pPr>
+            <a:r>
+              <a:rPr sz="1800" b="0" i="0">
+                <a:solidFill>
+                  <a:srgbClr val="1C1B19"/>
+                </a:solidFill>
+                <a:latin typeface="Source Serif 4"/>
+              </a:rPr>
+              <a:t>“______ is such a waste of time.” Fill in any school event. The other advisees chime in agreement.</a:t>
+            </a:r>
+          </a:p>
+        </p:txBody>
+      </p:sp>
+      <p:sp>
+        <p:nvSpPr>
+          <p:cNvPr id="9" name="Rectangle 8"/>
+          <p:cNvSpPr/>
+          <p:nvPr/>
+        </p:nvSpPr>
+        <p:spPr>
+          <a:xfrm>
+            <a:off x="3520439" y="2103120"/>
+            <a:ext cx="2423160" cy="3840480"/>
+          </a:xfrm>
+          <a:prstGeom prst="rect">
+            <a:avLst/>
+          </a:prstGeom>
+          <a:solidFill>
+            <a:srgbClr val="FFFFFF"/>
+          </a:solidFill>
+          <a:ln w="15875">
+            <a:solidFill>
+              <a:srgbClr val="D8D2C6"/>
+            </a:solidFill>
+          </a:ln>
+          <a:effectLst/>
+        </p:spPr>
+        <p:style>
+          <a:lnRef idx="1">
+            <a:schemeClr val="accent1"/>
+          </a:lnRef>
+          <a:fillRef idx="3">
+            <a:schemeClr val="accent1"/>
+          </a:fillRef>
+          <a:effectRef idx="2">
+            <a:schemeClr val="accent1"/>
+          </a:effectRef>
+          <a:fontRef idx="minor">
+            <a:schemeClr val="lt1"/>
+          </a:fontRef>
+        </p:style>
+        <p:txBody>
+          <a:bodyPr rtlCol="0" anchor="ctr"/>
+          <a:lstStyle/>
+          <a:p>
+            <a:pPr algn="ctr"/>
+          </a:p>
+        </p:txBody>
+      </p:sp>
+      <p:sp>
+        <p:nvSpPr>
+          <p:cNvPr id="10" name="TextBox 9"/>
+          <p:cNvSpPr txBox="1"/>
+          <p:nvPr/>
+        </p:nvSpPr>
+        <p:spPr>
+          <a:xfrm>
+            <a:off x="3749039" y="2286000"/>
+            <a:ext cx="1965960" cy="365760"/>
+          </a:xfrm>
+          <a:prstGeom prst="rect">
+            <a:avLst/>
+          </a:prstGeom>
+          <a:noFill/>
+        </p:spPr>
+        <p:txBody>
+          <a:bodyPr wrap="square" anchor="t" lIns="0" rIns="0" tIns="0" bIns="0">
+            <a:spAutoFit/>
+          </a:bodyPr>
+          <a:lstStyle/>
+          <a:p>
+            <a:pPr algn="l">
+              <a:spcAft>
+                <a:spcPts val="585"/>
+              </a:spcAft>
+            </a:pPr>
+            <a:r>
+              <a:rPr sz="1300" b="1" i="0">
+                <a:solidFill>
+                  <a:srgbClr val="0B2D5B"/>
+                </a:solidFill>
+                <a:latin typeface="Inter Tight"/>
+              </a:rPr>
+              <a:t>NOTHING</a:t>
+            </a:r>
+          </a:p>
+        </p:txBody>
+      </p:sp>
+      <p:sp>
+        <p:nvSpPr>
+          <p:cNvPr id="11" name="TextBox 10"/>
+          <p:cNvSpPr txBox="1"/>
+          <p:nvPr/>
+        </p:nvSpPr>
+        <p:spPr>
+          <a:xfrm>
+            <a:off x="3749039" y="2743200"/>
+            <a:ext cx="1965960" cy="3017520"/>
+          </a:xfrm>
+          <a:prstGeom prst="rect">
+            <a:avLst/>
+          </a:prstGeom>
+          <a:noFill/>
+        </p:spPr>
+        <p:txBody>
+          <a:bodyPr wrap="square" anchor="t" lIns="0" rIns="0" tIns="0" bIns="0">
+            <a:spAutoFit/>
+          </a:bodyPr>
+          <a:lstStyle/>
+          <a:p>
+            <a:pPr algn="l">
+              <a:spcAft>
+                <a:spcPts val="810"/>
+              </a:spcAft>
+            </a:pPr>
+            <a:r>
+              <a:rPr sz="1800" b="0" i="0">
+                <a:solidFill>
+                  <a:srgbClr val="1C1B19"/>
+                </a:solidFill>
+                <a:latin typeface="Source Serif 4"/>
+              </a:rPr>
+              <a:t>You bring up a schoolwide email. One-word answers, eyes on the floor, two students on their phones.</a:t>
+            </a:r>
+          </a:p>
+        </p:txBody>
+      </p:sp>
+      <p:sp>
+        <p:nvSpPr>
+          <p:cNvPr id="12" name="Rectangle 11"/>
+          <p:cNvSpPr/>
+          <p:nvPr/>
+        </p:nvSpPr>
+        <p:spPr>
+          <a:xfrm>
+            <a:off x="6217920" y="2103120"/>
+            <a:ext cx="2423160" cy="3840480"/>
+          </a:xfrm>
+          <a:prstGeom prst="rect">
+            <a:avLst/>
+          </a:prstGeom>
+          <a:solidFill>
+            <a:srgbClr val="FFFFFF"/>
+          </a:solidFill>
+          <a:ln w="15875">
+            <a:solidFill>
+              <a:srgbClr val="D8D2C6"/>
+            </a:solidFill>
+          </a:ln>
+          <a:effectLst/>
+        </p:spPr>
+        <p:style>
+          <a:lnRef idx="1">
+            <a:schemeClr val="accent1"/>
+          </a:lnRef>
+          <a:fillRef idx="3">
+            <a:schemeClr val="accent1"/>
+          </a:fillRef>
+          <a:effectRef idx="2">
+            <a:schemeClr val="accent1"/>
+          </a:effectRef>
+          <a:fontRef idx="minor">
+            <a:schemeClr val="lt1"/>
+          </a:fontRef>
+        </p:style>
+        <p:txBody>
+          <a:bodyPr rtlCol="0" anchor="ctr"/>
+          <a:lstStyle/>
+          <a:p>
+            <a:pPr algn="ctr"/>
+          </a:p>
+        </p:txBody>
+      </p:sp>
+      <p:sp>
+        <p:nvSpPr>
+          <p:cNvPr id="13" name="TextBox 12"/>
+          <p:cNvSpPr txBox="1"/>
+          <p:nvPr/>
+        </p:nvSpPr>
+        <p:spPr>
+          <a:xfrm>
+            <a:off x="6446520" y="2286000"/>
+            <a:ext cx="1965960" cy="365760"/>
+          </a:xfrm>
+          <a:prstGeom prst="rect">
+            <a:avLst/>
+          </a:prstGeom>
+          <a:noFill/>
+        </p:spPr>
+        <p:txBody>
+          <a:bodyPr wrap="square" anchor="t" lIns="0" rIns="0" tIns="0" bIns="0">
+            <a:spAutoFit/>
+          </a:bodyPr>
+          <a:lstStyle/>
+          <a:p>
+            <a:pPr algn="l">
+              <a:spcAft>
+                <a:spcPts val="585"/>
+              </a:spcAft>
+            </a:pPr>
+            <a:r>
+              <a:rPr sz="1300" b="1" i="0">
+                <a:solidFill>
+                  <a:srgbClr val="0B2D5B"/>
+                </a:solidFill>
+                <a:latin typeface="Inter Tight"/>
+              </a:rPr>
+              <a:t>NO CLUE</a:t>
+            </a:r>
+          </a:p>
+        </p:txBody>
+      </p:sp>
+      <p:sp>
+        <p:nvSpPr>
+          <p:cNvPr id="14" name="TextBox 13"/>
+          <p:cNvSpPr txBox="1"/>
+          <p:nvPr/>
+        </p:nvSpPr>
+        <p:spPr>
+          <a:xfrm>
+            <a:off x="6446520" y="2743200"/>
+            <a:ext cx="1965960" cy="3017520"/>
+          </a:xfrm>
+          <a:prstGeom prst="rect">
+            <a:avLst/>
+          </a:prstGeom>
+          <a:noFill/>
+        </p:spPr>
+        <p:txBody>
+          <a:bodyPr wrap="square" anchor="t" lIns="0" rIns="0" tIns="0" bIns="0">
+            <a:spAutoFit/>
+          </a:bodyPr>
+          <a:lstStyle/>
+          <a:p>
+            <a:pPr algn="l">
+              <a:spcAft>
+                <a:spcPts val="810"/>
+              </a:spcAft>
+            </a:pPr>
+            <a:r>
+              <a:rPr sz="1800" b="0" i="0">
+                <a:solidFill>
+                  <a:srgbClr val="1C1B19"/>
+                </a:solidFill>
+                <a:latin typeface="Source Serif 4"/>
+              </a:rPr>
+              <a:t>“Adults just don’t get it. They can’t possibly understand what it’s really like for me.”</a:t>
+            </a:r>
+          </a:p>
+        </p:txBody>
+      </p:sp>
+      <p:sp>
+        <p:nvSpPr>
+          <p:cNvPr id="15" name="Rectangle 14"/>
+          <p:cNvSpPr/>
+          <p:nvPr/>
+        </p:nvSpPr>
+        <p:spPr>
+          <a:xfrm>
+            <a:off x="8915400" y="2103120"/>
+            <a:ext cx="2423160" cy="3840480"/>
+          </a:xfrm>
+          <a:prstGeom prst="rect">
+            <a:avLst/>
+          </a:prstGeom>
+          <a:solidFill>
+            <a:srgbClr val="FFFFFF"/>
+          </a:solidFill>
+          <a:ln w="15875">
+            <a:solidFill>
+              <a:srgbClr val="D8D2C6"/>
+            </a:solidFill>
+          </a:ln>
+          <a:effectLst/>
+        </p:spPr>
+        <p:style>
+          <a:lnRef idx="1">
+            <a:schemeClr val="accent1"/>
+          </a:lnRef>
+          <a:fillRef idx="3">
+            <a:schemeClr val="accent1"/>
+          </a:fillRef>
+          <a:effectRef idx="2">
+            <a:schemeClr val="accent1"/>
+          </a:effectRef>
+          <a:fontRef idx="minor">
+            <a:schemeClr val="lt1"/>
+          </a:fontRef>
+        </p:style>
+        <p:txBody>
+          <a:bodyPr rtlCol="0" anchor="ctr"/>
+          <a:lstStyle/>
+          <a:p>
+            <a:pPr algn="ctr"/>
+          </a:p>
+        </p:txBody>
+      </p:sp>
+      <p:sp>
+        <p:nvSpPr>
+          <p:cNvPr id="16" name="TextBox 15"/>
+          <p:cNvSpPr txBox="1"/>
+          <p:nvPr/>
+        </p:nvSpPr>
+        <p:spPr>
+          <a:xfrm>
+            <a:off x="9144000" y="2286000"/>
+            <a:ext cx="1965960" cy="365760"/>
+          </a:xfrm>
+          <a:prstGeom prst="rect">
+            <a:avLst/>
+          </a:prstGeom>
+          <a:noFill/>
+        </p:spPr>
+        <p:txBody>
+          <a:bodyPr wrap="square" anchor="t" lIns="0" rIns="0" tIns="0" bIns="0">
+            <a:spAutoFit/>
+          </a:bodyPr>
+          <a:lstStyle/>
+          <a:p>
+            <a:pPr algn="l">
+              <a:spcAft>
+                <a:spcPts val="585"/>
+              </a:spcAft>
+            </a:pPr>
+            <a:r>
+              <a:rPr sz="1300" b="1" i="0">
+                <a:solidFill>
+                  <a:srgbClr val="0B2D5B"/>
+                </a:solidFill>
+                <a:latin typeface="Inter Tight"/>
+              </a:rPr>
+              <a:t>SOMETHING HEAVY</a:t>
+            </a:r>
+          </a:p>
+        </p:txBody>
+      </p:sp>
+      <p:sp>
+        <p:nvSpPr>
+          <p:cNvPr id="17" name="TextBox 16"/>
+          <p:cNvSpPr txBox="1"/>
+          <p:nvPr/>
+        </p:nvSpPr>
+        <p:spPr>
+          <a:xfrm>
+            <a:off x="9144000" y="2743200"/>
+            <a:ext cx="1965960" cy="3017520"/>
+          </a:xfrm>
+          <a:prstGeom prst="rect">
+            <a:avLst/>
+          </a:prstGeom>
+          <a:noFill/>
+        </p:spPr>
+        <p:txBody>
+          <a:bodyPr wrap="square" anchor="t" lIns="0" rIns="0" tIns="0" bIns="0">
+            <a:spAutoFit/>
+          </a:bodyPr>
+          <a:lstStyle/>
+          <a:p>
+            <a:pPr algn="l">
+              <a:spcAft>
+                <a:spcPts val="810"/>
+              </a:spcAft>
+            </a:pPr>
+            <a:r>
+              <a:rPr sz="1800" b="0" i="0">
+                <a:solidFill>
+                  <a:srgbClr val="1C1B19"/>
+                </a:solidFill>
+                <a:latin typeface="Source Serif 4"/>
+              </a:rPr>
+              <a:t>Near the end, a quiet student says things at home are hard right now.</a:t>
             </a:r>
           </a:p>
         </p:txBody>
@@ -6634,7 +6995,7 @@
                 </a:solidFill>
                 <a:latin typeface="Inter Tight"/>
               </a:rPr>
-              <a:t>YOUR TURN</a:t>
+              <a:t>TWO MORE THINGS</a:t>
             </a:r>
           </a:p>
         </p:txBody>
@@ -6712,7 +7073,7 @@
                 </a:solidFill>
                 <a:latin typeface="Source Serif 4"/>
               </a:rPr>
-              <a:t>Groups of five. One leads, four play. Rotate.</a:t>
+              <a:t>The floor, and the freedom.</a:t>
             </a:r>
           </a:p>
         </p:txBody>
@@ -6726,7 +7087,7 @@
         <p:spPr>
           <a:xfrm>
             <a:off x="822960" y="2103120"/>
-            <a:ext cx="1883664" cy="3840480"/>
+            <a:ext cx="5120640" cy="3931920"/>
           </a:xfrm>
           <a:prstGeom prst="rect">
             <a:avLst/>
@@ -6771,8 +7132,8 @@
         </p:nvSpPr>
         <p:spPr>
           <a:xfrm>
-            <a:off x="1051560" y="2286000"/>
-            <a:ext cx="1426464" cy="365760"/>
+            <a:off x="1097280" y="2286000"/>
+            <a:ext cx="4572000" cy="457200"/>
           </a:xfrm>
           <a:prstGeom prst="rect">
             <a:avLst/>
@@ -6797,7 +7158,7 @@
                 </a:solidFill>
                 <a:latin typeface="Inter Tight"/>
               </a:rPr>
-              <a:t>THE CRITIC</a:t>
+              <a:t>IF SOMETHING HEAVY COMES UP</a:t>
             </a:r>
           </a:p>
         </p:txBody>
@@ -6810,8 +7171,8 @@
         </p:nvSpPr>
         <p:spPr>
           <a:xfrm>
-            <a:off x="1051560" y="2743200"/>
-            <a:ext cx="1426464" cy="3017520"/>
+            <a:off x="1097280" y="2788920"/>
+            <a:ext cx="4572000" cy="3108960"/>
           </a:xfrm>
           <a:prstGeom prst="rect">
             <a:avLst/>
@@ -6826,17 +7187,65 @@
           <a:p>
             <a:pPr algn="l">
               <a:spcAft>
-                <a:spcPts val="810"/>
-              </a:spcAft>
-            </a:pPr>
-            <a:r>
-              <a:rPr sz="1800" b="0" i="0">
+                <a:spcPts val="855"/>
+              </a:spcAft>
+            </a:pPr>
+            <a:r>
+              <a:rPr sz="1900" b="0" i="0">
                 <a:solidFill>
                   <a:srgbClr val="1C1B19"/>
                 </a:solidFill>
                 <a:latin typeface="Source Serif 4"/>
               </a:rPr>
-              <a:t>"This is so cringe." Wants to see if you get defensive.</a:t>
+              <a:t>Thank them</a:t>
+            </a:r>
+          </a:p>
+          <a:p>
+            <a:pPr algn="l">
+              <a:spcAft>
+                <a:spcPts val="855"/>
+              </a:spcAft>
+            </a:pPr>
+            <a:r>
+              <a:rPr sz="1900" b="0" i="0">
+                <a:solidFill>
+                  <a:srgbClr val="1C1B19"/>
+                </a:solidFill>
+                <a:latin typeface="Source Serif 4"/>
+              </a:rPr>
+              <a:t>Keep it short in the group</a:t>
+            </a:r>
+          </a:p>
+          <a:p>
+            <a:pPr algn="l">
+              <a:spcAft>
+                <a:spcPts val="855"/>
+              </a:spcAft>
+            </a:pPr>
+            <a:r>
+              <a:rPr sz="1900" b="0" i="0">
+                <a:solidFill>
+                  <a:srgbClr val="1C1B19"/>
+                </a:solidFill>
+                <a:latin typeface="Source Serif 4"/>
+              </a:rPr>
+              <a:t>Check in privately after</a:t>
+            </a:r>
+          </a:p>
+          <a:p>
+            <a:pPr algn="l">
+              <a:spcAft>
+                <a:spcPts val="855"/>
+              </a:spcAft>
+            </a:pPr>
+            <a:r>
+              <a:rPr sz="1900" b="0" i="0">
+                <a:solidFill>
+                  <a:srgbClr val="1C1B19"/>
+                </a:solidFill>
+                <a:latin typeface="Source Serif 4"/>
+              </a:rPr>
+              <a:t>Walk them to a counselor that day</a:t>
             </a:r>
           </a:p>
         </p:txBody>
@@ -6849,8 +7258,8 @@
         </p:nvSpPr>
         <p:spPr>
           <a:xfrm>
-            <a:off x="2980944" y="2103120"/>
-            <a:ext cx="1883664" cy="3840480"/>
+            <a:off x="6309360" y="2103120"/>
+            <a:ext cx="5120640" cy="3931920"/>
           </a:xfrm>
           <a:prstGeom prst="rect">
             <a:avLst/>
@@ -6895,8 +7304,8 @@
         </p:nvSpPr>
         <p:spPr>
           <a:xfrm>
-            <a:off x="3209544" y="2286000"/>
-            <a:ext cx="1426464" cy="365760"/>
+            <a:off x="6583680" y="2286000"/>
+            <a:ext cx="4572000" cy="457200"/>
           </a:xfrm>
           <a:prstGeom prst="rect">
             <a:avLst/>
@@ -6921,7 +7330,7 @@
                 </a:solidFill>
                 <a:latin typeface="Inter Tight"/>
               </a:rPr>
-              <a:t>THE SHRUGGER</a:t>
+              <a:t>OFF YOUR PLATE</a:t>
             </a:r>
           </a:p>
         </p:txBody>
@@ -6934,8 +7343,8 @@
         </p:nvSpPr>
         <p:spPr>
           <a:xfrm>
-            <a:off x="3209544" y="2743200"/>
-            <a:ext cx="1426464" cy="3017520"/>
+            <a:off x="6583680" y="2788920"/>
+            <a:ext cx="4572000" cy="3108960"/>
           </a:xfrm>
           <a:prstGeom prst="rect">
             <a:avLst/>
@@ -6950,389 +7359,65 @@
           <a:p>
             <a:pPr algn="l">
               <a:spcAft>
-                <a:spcPts val="810"/>
-              </a:spcAft>
-            </a:pPr>
-            <a:r>
-              <a:rPr sz="1800" b="0" i="0">
+                <a:spcPts val="855"/>
+              </a:spcAft>
+            </a:pPr>
+            <a:r>
+              <a:rPr sz="1900" b="0" i="0">
                 <a:solidFill>
                   <a:srgbClr val="1C1B19"/>
                 </a:solidFill>
                 <a:latin typeface="Source Serif 4"/>
               </a:rPr>
-              <a:t>One-word answers, eyes on the table.</a:t>
-            </a:r>
-          </a:p>
-        </p:txBody>
-      </p:sp>
-      <p:sp>
-        <p:nvSpPr>
-          <p:cNvPr id="12" name="Rectangle 11"/>
-          <p:cNvSpPr/>
-          <p:nvPr/>
-        </p:nvSpPr>
-        <p:spPr>
-          <a:xfrm>
-            <a:off x="5138928" y="2103120"/>
-            <a:ext cx="1883664" cy="3840480"/>
-          </a:xfrm>
-          <a:prstGeom prst="rect">
-            <a:avLst/>
-          </a:prstGeom>
-          <a:solidFill>
-            <a:srgbClr val="FFFFFF"/>
-          </a:solidFill>
-          <a:ln w="15875">
-            <a:solidFill>
-              <a:srgbClr val="D8D2C6"/>
-            </a:solidFill>
-          </a:ln>
-          <a:effectLst/>
-        </p:spPr>
-        <p:style>
-          <a:lnRef idx="1">
-            <a:schemeClr val="accent1"/>
-          </a:lnRef>
-          <a:fillRef idx="3">
-            <a:schemeClr val="accent1"/>
-          </a:fillRef>
-          <a:effectRef idx="2">
-            <a:schemeClr val="accent1"/>
-          </a:effectRef>
-          <a:fontRef idx="minor">
-            <a:schemeClr val="lt1"/>
-          </a:fontRef>
-        </p:style>
-        <p:txBody>
-          <a:bodyPr rtlCol="0" anchor="ctr"/>
-          <a:lstStyle/>
-          <a:p>
-            <a:pPr algn="ctr"/>
-          </a:p>
-        </p:txBody>
-      </p:sp>
-      <p:sp>
-        <p:nvSpPr>
-          <p:cNvPr id="13" name="TextBox 12"/>
-          <p:cNvSpPr txBox="1"/>
-          <p:nvPr/>
-        </p:nvSpPr>
-        <p:spPr>
-          <a:xfrm>
-            <a:off x="5367528" y="2286000"/>
-            <a:ext cx="1426464" cy="365760"/>
-          </a:xfrm>
-          <a:prstGeom prst="rect">
-            <a:avLst/>
-          </a:prstGeom>
-          <a:noFill/>
-        </p:spPr>
-        <p:txBody>
-          <a:bodyPr wrap="square" anchor="t" lIns="0" rIns="0" tIns="0" bIns="0">
-            <a:spAutoFit/>
-          </a:bodyPr>
-          <a:lstStyle/>
-          <a:p>
-            <a:pPr algn="l">
-              <a:spcAft>
-                <a:spcPts val="585"/>
-              </a:spcAft>
-            </a:pPr>
-            <a:r>
-              <a:rPr sz="1300" b="1" i="0">
-                <a:solidFill>
-                  <a:srgbClr val="0B2D5B"/>
-                </a:solidFill>
-                <a:latin typeface="Inter Tight"/>
-              </a:rPr>
-              <a:t>THE EXPERT</a:t>
-            </a:r>
-          </a:p>
-        </p:txBody>
-      </p:sp>
-      <p:sp>
-        <p:nvSpPr>
-          <p:cNvPr id="14" name="TextBox 13"/>
-          <p:cNvSpPr txBox="1"/>
-          <p:nvPr/>
-        </p:nvSpPr>
-        <p:spPr>
-          <a:xfrm>
-            <a:off x="5367528" y="2743200"/>
-            <a:ext cx="1426464" cy="3017520"/>
-          </a:xfrm>
-          <a:prstGeom prst="rect">
-            <a:avLst/>
-          </a:prstGeom>
-          <a:noFill/>
-        </p:spPr>
-        <p:txBody>
-          <a:bodyPr wrap="square" anchor="t" lIns="0" rIns="0" tIns="0" bIns="0">
-            <a:spAutoFit/>
-          </a:bodyPr>
-          <a:lstStyle/>
-          <a:p>
-            <a:pPr algn="l">
-              <a:spcAft>
-                <a:spcPts val="810"/>
-              </a:spcAft>
-            </a:pPr>
-            <a:r>
-              <a:rPr sz="1800" b="0" i="0">
+              <a:t>Cover every point</a:t>
+            </a:r>
+          </a:p>
+          <a:p>
+            <a:pPr algn="l">
+              <a:spcAft>
+                <a:spcPts val="855"/>
+              </a:spcAft>
+            </a:pPr>
+            <a:r>
+              <a:rPr sz="1900" b="0" i="0">
                 <a:solidFill>
                   <a:srgbClr val="1C1B19"/>
                 </a:solidFill>
                 <a:latin typeface="Source Serif 4"/>
               </a:rPr>
-              <a:t>"Adults have no idea what it's really like."</a:t>
-            </a:r>
-          </a:p>
-        </p:txBody>
-      </p:sp>
-      <p:sp>
-        <p:nvSpPr>
-          <p:cNvPr id="15" name="Rectangle 14"/>
-          <p:cNvSpPr/>
-          <p:nvPr/>
-        </p:nvSpPr>
-        <p:spPr>
-          <a:xfrm>
-            <a:off x="7296912" y="2103120"/>
-            <a:ext cx="1883664" cy="3840480"/>
-          </a:xfrm>
-          <a:prstGeom prst="rect">
-            <a:avLst/>
-          </a:prstGeom>
-          <a:solidFill>
-            <a:srgbClr val="FFFFFF"/>
-          </a:solidFill>
-          <a:ln w="15875">
-            <a:solidFill>
-              <a:srgbClr val="D8D2C6"/>
-            </a:solidFill>
-          </a:ln>
-          <a:effectLst/>
-        </p:spPr>
-        <p:style>
-          <a:lnRef idx="1">
-            <a:schemeClr val="accent1"/>
-          </a:lnRef>
-          <a:fillRef idx="3">
-            <a:schemeClr val="accent1"/>
-          </a:fillRef>
-          <a:effectRef idx="2">
-            <a:schemeClr val="accent1"/>
-          </a:effectRef>
-          <a:fontRef idx="minor">
-            <a:schemeClr val="lt1"/>
-          </a:fontRef>
-        </p:style>
-        <p:txBody>
-          <a:bodyPr rtlCol="0" anchor="ctr"/>
-          <a:lstStyle/>
-          <a:p>
-            <a:pPr algn="ctr"/>
-          </a:p>
-        </p:txBody>
-      </p:sp>
-      <p:sp>
-        <p:nvSpPr>
-          <p:cNvPr id="16" name="TextBox 15"/>
-          <p:cNvSpPr txBox="1"/>
-          <p:nvPr/>
-        </p:nvSpPr>
-        <p:spPr>
-          <a:xfrm>
-            <a:off x="7525512" y="2286000"/>
-            <a:ext cx="1426464" cy="365760"/>
-          </a:xfrm>
-          <a:prstGeom prst="rect">
-            <a:avLst/>
-          </a:prstGeom>
-          <a:noFill/>
-        </p:spPr>
-        <p:txBody>
-          <a:bodyPr wrap="square" anchor="t" lIns="0" rIns="0" tIns="0" bIns="0">
-            <a:spAutoFit/>
-          </a:bodyPr>
-          <a:lstStyle/>
-          <a:p>
-            <a:pPr algn="l">
-              <a:spcAft>
-                <a:spcPts val="585"/>
-              </a:spcAft>
-            </a:pPr>
-            <a:r>
-              <a:rPr sz="1300" b="1" i="0">
-                <a:solidFill>
-                  <a:srgbClr val="0B2D5B"/>
-                </a:solidFill>
-                <a:latin typeface="Inter Tight"/>
-              </a:rPr>
-              <a:t>THE JOKER</a:t>
-            </a:r>
-          </a:p>
-        </p:txBody>
-      </p:sp>
-      <p:sp>
-        <p:nvSpPr>
-          <p:cNvPr id="17" name="TextBox 16"/>
-          <p:cNvSpPr txBox="1"/>
-          <p:nvPr/>
-        </p:nvSpPr>
-        <p:spPr>
-          <a:xfrm>
-            <a:off x="7525512" y="2743200"/>
-            <a:ext cx="1426464" cy="3017520"/>
-          </a:xfrm>
-          <a:prstGeom prst="rect">
-            <a:avLst/>
-          </a:prstGeom>
-          <a:noFill/>
-        </p:spPr>
-        <p:txBody>
-          <a:bodyPr wrap="square" anchor="t" lIns="0" rIns="0" tIns="0" bIns="0">
-            <a:spAutoFit/>
-          </a:bodyPr>
-          <a:lstStyle/>
-          <a:p>
-            <a:pPr algn="l">
-              <a:spcAft>
-                <a:spcPts val="810"/>
-              </a:spcAft>
-            </a:pPr>
-            <a:r>
-              <a:rPr sz="1800" b="0" i="0">
+              <a:t>Get everyone to agree</a:t>
+            </a:r>
+          </a:p>
+          <a:p>
+            <a:pPr algn="l">
+              <a:spcAft>
+                <a:spcPts val="855"/>
+              </a:spcAft>
+            </a:pPr>
+            <a:r>
+              <a:rPr sz="1900" b="0" i="0">
                 <a:solidFill>
                   <a:srgbClr val="1C1B19"/>
                 </a:solidFill>
                 <a:latin typeface="Source Serif 4"/>
               </a:rPr>
-              <a:t>Turns every question into a bit.</a:t>
-            </a:r>
-          </a:p>
-        </p:txBody>
-      </p:sp>
-      <p:sp>
-        <p:nvSpPr>
-          <p:cNvPr id="18" name="Rectangle 17"/>
-          <p:cNvSpPr/>
-          <p:nvPr/>
-        </p:nvSpPr>
-        <p:spPr>
-          <a:xfrm>
-            <a:off x="9454896" y="2103120"/>
-            <a:ext cx="1883664" cy="3840480"/>
-          </a:xfrm>
-          <a:prstGeom prst="rect">
-            <a:avLst/>
-          </a:prstGeom>
-          <a:solidFill>
-            <a:srgbClr val="FFFFFF"/>
-          </a:solidFill>
-          <a:ln w="15875">
-            <a:solidFill>
-              <a:srgbClr val="D8D2C6"/>
-            </a:solidFill>
-          </a:ln>
-          <a:effectLst/>
-        </p:spPr>
-        <p:style>
-          <a:lnRef idx="1">
-            <a:schemeClr val="accent1"/>
-          </a:lnRef>
-          <a:fillRef idx="3">
-            <a:schemeClr val="accent1"/>
-          </a:fillRef>
-          <a:effectRef idx="2">
-            <a:schemeClr val="accent1"/>
-          </a:effectRef>
-          <a:fontRef idx="minor">
-            <a:schemeClr val="lt1"/>
-          </a:fontRef>
-        </p:style>
-        <p:txBody>
-          <a:bodyPr rtlCol="0" anchor="ctr"/>
-          <a:lstStyle/>
-          <a:p>
-            <a:pPr algn="ctr"/>
-          </a:p>
-        </p:txBody>
-      </p:sp>
-      <p:sp>
-        <p:nvSpPr>
-          <p:cNvPr id="19" name="TextBox 18"/>
-          <p:cNvSpPr txBox="1"/>
-          <p:nvPr/>
-        </p:nvSpPr>
-        <p:spPr>
-          <a:xfrm>
-            <a:off x="9683496" y="2286000"/>
-            <a:ext cx="1426464" cy="365760"/>
-          </a:xfrm>
-          <a:prstGeom prst="rect">
-            <a:avLst/>
-          </a:prstGeom>
-          <a:noFill/>
-        </p:spPr>
-        <p:txBody>
-          <a:bodyPr wrap="square" anchor="t" lIns="0" rIns="0" tIns="0" bIns="0">
-            <a:spAutoFit/>
-          </a:bodyPr>
-          <a:lstStyle/>
-          <a:p>
-            <a:pPr algn="l">
-              <a:spcAft>
-                <a:spcPts val="585"/>
-              </a:spcAft>
-            </a:pPr>
-            <a:r>
-              <a:rPr sz="1300" b="1" i="0">
-                <a:solidFill>
-                  <a:srgbClr val="0B2D5B"/>
-                </a:solidFill>
-                <a:latin typeface="Inter Tight"/>
-              </a:rPr>
-              <a:t>THE SIDE-TALKERS</a:t>
-            </a:r>
-          </a:p>
-        </p:txBody>
-      </p:sp>
-      <p:sp>
-        <p:nvSpPr>
-          <p:cNvPr id="20" name="TextBox 19"/>
-          <p:cNvSpPr txBox="1"/>
-          <p:nvPr/>
-        </p:nvSpPr>
-        <p:spPr>
-          <a:xfrm>
-            <a:off x="9683496" y="2743200"/>
-            <a:ext cx="1426464" cy="3017520"/>
-          </a:xfrm>
-          <a:prstGeom prst="rect">
-            <a:avLst/>
-          </a:prstGeom>
-          <a:noFill/>
-        </p:spPr>
-        <p:txBody>
-          <a:bodyPr wrap="square" anchor="t" lIns="0" rIns="0" tIns="0" bIns="0">
-            <a:spAutoFit/>
-          </a:bodyPr>
-          <a:lstStyle/>
-          <a:p>
-            <a:pPr algn="l">
-              <a:spcAft>
-                <a:spcPts val="810"/>
-              </a:spcAft>
-            </a:pPr>
-            <a:r>
-              <a:rPr sz="1800" b="0" i="0">
+              <a:t>Be the expert on the topic</a:t>
+            </a:r>
+          </a:p>
+          <a:p>
+            <a:pPr algn="l">
+              <a:spcAft>
+                <a:spcPts val="855"/>
+              </a:spcAft>
+            </a:pPr>
+            <a:r>
+              <a:rPr sz="1900" b="0" i="0">
                 <a:solidFill>
                   <a:srgbClr val="1C1B19"/>
                 </a:solidFill>
                 <a:latin typeface="Source Serif 4"/>
               </a:rPr>
-              <a:t>Two players also whisper to each other or check a phone or laptop.</a:t>
+              <a:t>Fill every quiet moment with a lecture</a:t>
             </a:r>
           </a:p>
         </p:txBody>
@@ -7441,537 +7526,6 @@
                 </a:solidFill>
                 <a:latin typeface="Inter Tight"/>
               </a:rPr>
-              <a:t>TWO MORE THINGS</a:t>
-            </a:r>
-          </a:p>
-        </p:txBody>
-      </p:sp>
-      <p:sp>
-        <p:nvSpPr>
-          <p:cNvPr id="4" name="TextBox 3"/>
-          <p:cNvSpPr txBox="1"/>
-          <p:nvPr/>
-        </p:nvSpPr>
-        <p:spPr>
-          <a:xfrm>
-            <a:off x="8229600" y="6400800"/>
-            <a:ext cx="3410712" cy="274320"/>
-          </a:xfrm>
-          <a:prstGeom prst="rect">
-            <a:avLst/>
-          </a:prstGeom>
-          <a:noFill/>
-        </p:spPr>
-        <p:txBody>
-          <a:bodyPr wrap="square" anchor="t" lIns="0" rIns="0" tIns="0" bIns="0">
-            <a:spAutoFit/>
-          </a:bodyPr>
-          <a:lstStyle/>
-          <a:p>
-            <a:pPr algn="r">
-              <a:spcAft>
-                <a:spcPts val="450"/>
-              </a:spcAft>
-            </a:pPr>
-            <a:r>
-              <a:rPr sz="1000" b="0" i="0">
-                <a:solidFill>
-                  <a:srgbClr val="5D5A54"/>
-                </a:solidFill>
-                <a:latin typeface="Inter Tight"/>
-              </a:rPr>
-              <a:t>Beaver Counseling</a:t>
-            </a:r>
-          </a:p>
-        </p:txBody>
-      </p:sp>
-      <p:sp>
-        <p:nvSpPr>
-          <p:cNvPr id="5" name="TextBox 4"/>
-          <p:cNvSpPr txBox="1"/>
-          <p:nvPr/>
-        </p:nvSpPr>
-        <p:spPr>
-          <a:xfrm>
-            <a:off x="822960" y="1005840"/>
-            <a:ext cx="10515600" cy="914400"/>
-          </a:xfrm>
-          <a:prstGeom prst="rect">
-            <a:avLst/>
-          </a:prstGeom>
-          <a:noFill/>
-        </p:spPr>
-        <p:txBody>
-          <a:bodyPr wrap="square" anchor="t" lIns="0" rIns="0" tIns="0" bIns="0">
-            <a:spAutoFit/>
-          </a:bodyPr>
-          <a:lstStyle/>
-          <a:p>
-            <a:pPr algn="l">
-              <a:spcAft>
-                <a:spcPts val="1530"/>
-              </a:spcAft>
-            </a:pPr>
-            <a:r>
-              <a:rPr sz="3400" b="1" i="0">
-                <a:solidFill>
-                  <a:srgbClr val="1C1B19"/>
-                </a:solidFill>
-                <a:latin typeface="Source Serif 4"/>
-              </a:rPr>
-              <a:t>The floor, and the freedom.</a:t>
-            </a:r>
-          </a:p>
-        </p:txBody>
-      </p:sp>
-      <p:sp>
-        <p:nvSpPr>
-          <p:cNvPr id="6" name="Rectangle 5"/>
-          <p:cNvSpPr/>
-          <p:nvPr/>
-        </p:nvSpPr>
-        <p:spPr>
-          <a:xfrm>
-            <a:off x="822960" y="2103120"/>
-            <a:ext cx="5120640" cy="3931920"/>
-          </a:xfrm>
-          <a:prstGeom prst="rect">
-            <a:avLst/>
-          </a:prstGeom>
-          <a:solidFill>
-            <a:srgbClr val="FFFFFF"/>
-          </a:solidFill>
-          <a:ln w="15875">
-            <a:solidFill>
-              <a:srgbClr val="D8D2C6"/>
-            </a:solidFill>
-          </a:ln>
-          <a:effectLst/>
-        </p:spPr>
-        <p:style>
-          <a:lnRef idx="1">
-            <a:schemeClr val="accent1"/>
-          </a:lnRef>
-          <a:fillRef idx="3">
-            <a:schemeClr val="accent1"/>
-          </a:fillRef>
-          <a:effectRef idx="2">
-            <a:schemeClr val="accent1"/>
-          </a:effectRef>
-          <a:fontRef idx="minor">
-            <a:schemeClr val="lt1"/>
-          </a:fontRef>
-        </p:style>
-        <p:txBody>
-          <a:bodyPr rtlCol="0" anchor="ctr"/>
-          <a:lstStyle/>
-          <a:p>
-            <a:pPr algn="ctr"/>
-          </a:p>
-        </p:txBody>
-      </p:sp>
-      <p:sp>
-        <p:nvSpPr>
-          <p:cNvPr id="7" name="TextBox 6"/>
-          <p:cNvSpPr txBox="1"/>
-          <p:nvPr/>
-        </p:nvSpPr>
-        <p:spPr>
-          <a:xfrm>
-            <a:off x="1097280" y="2286000"/>
-            <a:ext cx="4572000" cy="457200"/>
-          </a:xfrm>
-          <a:prstGeom prst="rect">
-            <a:avLst/>
-          </a:prstGeom>
-          <a:noFill/>
-        </p:spPr>
-        <p:txBody>
-          <a:bodyPr wrap="square" anchor="t" lIns="0" rIns="0" tIns="0" bIns="0">
-            <a:spAutoFit/>
-          </a:bodyPr>
-          <a:lstStyle/>
-          <a:p>
-            <a:pPr algn="l">
-              <a:spcAft>
-                <a:spcPts val="585"/>
-              </a:spcAft>
-            </a:pPr>
-            <a:r>
-              <a:rPr sz="1300" b="1" i="0">
-                <a:solidFill>
-                  <a:srgbClr val="0B2D5B"/>
-                </a:solidFill>
-                <a:latin typeface="Inter Tight"/>
-              </a:rPr>
-              <a:t>IF SOMETHING HEAVY COMES UP</a:t>
-            </a:r>
-          </a:p>
-        </p:txBody>
-      </p:sp>
-      <p:sp>
-        <p:nvSpPr>
-          <p:cNvPr id="8" name="TextBox 7"/>
-          <p:cNvSpPr txBox="1"/>
-          <p:nvPr/>
-        </p:nvSpPr>
-        <p:spPr>
-          <a:xfrm>
-            <a:off x="1097280" y="2788920"/>
-            <a:ext cx="4572000" cy="3108960"/>
-          </a:xfrm>
-          <a:prstGeom prst="rect">
-            <a:avLst/>
-          </a:prstGeom>
-          <a:noFill/>
-        </p:spPr>
-        <p:txBody>
-          <a:bodyPr wrap="square" anchor="t" lIns="0" rIns="0" tIns="0" bIns="0">
-            <a:spAutoFit/>
-          </a:bodyPr>
-          <a:lstStyle/>
-          <a:p>
-            <a:pPr algn="l">
-              <a:spcAft>
-                <a:spcPts val="855"/>
-              </a:spcAft>
-            </a:pPr>
-            <a:r>
-              <a:rPr sz="1900" b="0" i="0">
-                <a:solidFill>
-                  <a:srgbClr val="1C1B19"/>
-                </a:solidFill>
-                <a:latin typeface="Source Serif 4"/>
-              </a:rPr>
-              <a:t>Thank them</a:t>
-            </a:r>
-          </a:p>
-          <a:p>
-            <a:pPr algn="l">
-              <a:spcAft>
-                <a:spcPts val="855"/>
-              </a:spcAft>
-            </a:pPr>
-            <a:r>
-              <a:rPr sz="1900" b="0" i="0">
-                <a:solidFill>
-                  <a:srgbClr val="1C1B19"/>
-                </a:solidFill>
-                <a:latin typeface="Source Serif 4"/>
-              </a:rPr>
-              <a:t>Keep it short in the group</a:t>
-            </a:r>
-          </a:p>
-          <a:p>
-            <a:pPr algn="l">
-              <a:spcAft>
-                <a:spcPts val="855"/>
-              </a:spcAft>
-            </a:pPr>
-            <a:r>
-              <a:rPr sz="1900" b="0" i="0">
-                <a:solidFill>
-                  <a:srgbClr val="1C1B19"/>
-                </a:solidFill>
-                <a:latin typeface="Source Serif 4"/>
-              </a:rPr>
-              <a:t>Check in privately after</a:t>
-            </a:r>
-          </a:p>
-          <a:p>
-            <a:pPr algn="l">
-              <a:spcAft>
-                <a:spcPts val="855"/>
-              </a:spcAft>
-            </a:pPr>
-            <a:r>
-              <a:rPr sz="1900" b="0" i="0">
-                <a:solidFill>
-                  <a:srgbClr val="1C1B19"/>
-                </a:solidFill>
-                <a:latin typeface="Source Serif 4"/>
-              </a:rPr>
-              <a:t>Walk them to a counselor that day</a:t>
-            </a:r>
-          </a:p>
-        </p:txBody>
-      </p:sp>
-      <p:sp>
-        <p:nvSpPr>
-          <p:cNvPr id="9" name="Rectangle 8"/>
-          <p:cNvSpPr/>
-          <p:nvPr/>
-        </p:nvSpPr>
-        <p:spPr>
-          <a:xfrm>
-            <a:off x="6309360" y="2103120"/>
-            <a:ext cx="5120640" cy="3931920"/>
-          </a:xfrm>
-          <a:prstGeom prst="rect">
-            <a:avLst/>
-          </a:prstGeom>
-          <a:solidFill>
-            <a:srgbClr val="FFFFFF"/>
-          </a:solidFill>
-          <a:ln w="15875">
-            <a:solidFill>
-              <a:srgbClr val="D8D2C6"/>
-            </a:solidFill>
-          </a:ln>
-          <a:effectLst/>
-        </p:spPr>
-        <p:style>
-          <a:lnRef idx="1">
-            <a:schemeClr val="accent1"/>
-          </a:lnRef>
-          <a:fillRef idx="3">
-            <a:schemeClr val="accent1"/>
-          </a:fillRef>
-          <a:effectRef idx="2">
-            <a:schemeClr val="accent1"/>
-          </a:effectRef>
-          <a:fontRef idx="minor">
-            <a:schemeClr val="lt1"/>
-          </a:fontRef>
-        </p:style>
-        <p:txBody>
-          <a:bodyPr rtlCol="0" anchor="ctr"/>
-          <a:lstStyle/>
-          <a:p>
-            <a:pPr algn="ctr"/>
-          </a:p>
-        </p:txBody>
-      </p:sp>
-      <p:sp>
-        <p:nvSpPr>
-          <p:cNvPr id="10" name="TextBox 9"/>
-          <p:cNvSpPr txBox="1"/>
-          <p:nvPr/>
-        </p:nvSpPr>
-        <p:spPr>
-          <a:xfrm>
-            <a:off x="6583680" y="2286000"/>
-            <a:ext cx="4572000" cy="457200"/>
-          </a:xfrm>
-          <a:prstGeom prst="rect">
-            <a:avLst/>
-          </a:prstGeom>
-          <a:noFill/>
-        </p:spPr>
-        <p:txBody>
-          <a:bodyPr wrap="square" anchor="t" lIns="0" rIns="0" tIns="0" bIns="0">
-            <a:spAutoFit/>
-          </a:bodyPr>
-          <a:lstStyle/>
-          <a:p>
-            <a:pPr algn="l">
-              <a:spcAft>
-                <a:spcPts val="585"/>
-              </a:spcAft>
-            </a:pPr>
-            <a:r>
-              <a:rPr sz="1300" b="1" i="0">
-                <a:solidFill>
-                  <a:srgbClr val="0B2D5B"/>
-                </a:solidFill>
-                <a:latin typeface="Inter Tight"/>
-              </a:rPr>
-              <a:t>OFF YOUR PLATE</a:t>
-            </a:r>
-          </a:p>
-        </p:txBody>
-      </p:sp>
-      <p:sp>
-        <p:nvSpPr>
-          <p:cNvPr id="11" name="TextBox 10"/>
-          <p:cNvSpPr txBox="1"/>
-          <p:nvPr/>
-        </p:nvSpPr>
-        <p:spPr>
-          <a:xfrm>
-            <a:off x="6583680" y="2788920"/>
-            <a:ext cx="4572000" cy="3108960"/>
-          </a:xfrm>
-          <a:prstGeom prst="rect">
-            <a:avLst/>
-          </a:prstGeom>
-          <a:noFill/>
-        </p:spPr>
-        <p:txBody>
-          <a:bodyPr wrap="square" anchor="t" lIns="0" rIns="0" tIns="0" bIns="0">
-            <a:spAutoFit/>
-          </a:bodyPr>
-          <a:lstStyle/>
-          <a:p>
-            <a:pPr algn="l">
-              <a:spcAft>
-                <a:spcPts val="855"/>
-              </a:spcAft>
-            </a:pPr>
-            <a:r>
-              <a:rPr sz="1900" b="0" i="0">
-                <a:solidFill>
-                  <a:srgbClr val="1C1B19"/>
-                </a:solidFill>
-                <a:latin typeface="Source Serif 4"/>
-              </a:rPr>
-              <a:t>Cover every point</a:t>
-            </a:r>
-          </a:p>
-          <a:p>
-            <a:pPr algn="l">
-              <a:spcAft>
-                <a:spcPts val="855"/>
-              </a:spcAft>
-            </a:pPr>
-            <a:r>
-              <a:rPr sz="1900" b="0" i="0">
-                <a:solidFill>
-                  <a:srgbClr val="1C1B19"/>
-                </a:solidFill>
-                <a:latin typeface="Source Serif 4"/>
-              </a:rPr>
-              <a:t>Get everyone to agree</a:t>
-            </a:r>
-          </a:p>
-          <a:p>
-            <a:pPr algn="l">
-              <a:spcAft>
-                <a:spcPts val="855"/>
-              </a:spcAft>
-            </a:pPr>
-            <a:r>
-              <a:rPr sz="1900" b="0" i="0">
-                <a:solidFill>
-                  <a:srgbClr val="1C1B19"/>
-                </a:solidFill>
-                <a:latin typeface="Source Serif 4"/>
-              </a:rPr>
-              <a:t>Be the expert on the topic</a:t>
-            </a:r>
-          </a:p>
-          <a:p>
-            <a:pPr algn="l">
-              <a:spcAft>
-                <a:spcPts val="855"/>
-              </a:spcAft>
-            </a:pPr>
-            <a:r>
-              <a:rPr sz="1900" b="0" i="0">
-                <a:solidFill>
-                  <a:srgbClr val="1C1B19"/>
-                </a:solidFill>
-                <a:latin typeface="Source Serif 4"/>
-              </a:rPr>
-              <a:t>Fill every quiet moment with a lecture</a:t>
-            </a:r>
-          </a:p>
-        </p:txBody>
-      </p:sp>
-    </p:spTree>
-  </p:cSld>
-  <p:clrMapOvr>
-    <a:masterClrMapping/>
-  </p:clrMapOvr>
-</p:sld>
-</file>
-
-<file path=ppt/slides/slide16.xml><?xml version="1.0" encoding="utf-8"?>
-<p:sld xmlns:a="http://schemas.openxmlformats.org/drawingml/2006/main" xmlns:p="http://schemas.openxmlformats.org/presentationml/2006/main" xmlns:r="http://schemas.openxmlformats.org/officeDocument/2006/relationships">
-  <p:cSld>
-    <p:bg>
-      <p:bgPr>
-        <a:solidFill>
-          <a:srgbClr val="F7F4EE"/>
-        </a:solidFill>
-        <a:effectLst/>
-      </p:bgPr>
-    </p:bg>
-    <p:spTree>
-      <p:nvGrpSpPr>
-        <p:cNvPr id="1" name=""/>
-        <p:cNvGrpSpPr/>
-        <p:nvPr/>
-      </p:nvGrpSpPr>
-      <p:grpSpPr/>
-      <p:sp>
-        <p:nvSpPr>
-          <p:cNvPr id="2" name="Rectangle 1"/>
-          <p:cNvSpPr/>
-          <p:nvPr/>
-        </p:nvSpPr>
-        <p:spPr>
-          <a:xfrm>
-            <a:off x="548640" y="502920"/>
-            <a:ext cx="457200" cy="54864"/>
-          </a:xfrm>
-          <a:prstGeom prst="rect">
-            <a:avLst/>
-          </a:prstGeom>
-          <a:solidFill>
-            <a:srgbClr val="F47B20"/>
-          </a:solidFill>
-          <a:ln>
-            <a:noFill/>
-          </a:ln>
-          <a:effectLst/>
-        </p:spPr>
-        <p:style>
-          <a:lnRef idx="1">
-            <a:schemeClr val="accent1"/>
-          </a:lnRef>
-          <a:fillRef idx="3">
-            <a:schemeClr val="accent1"/>
-          </a:fillRef>
-          <a:effectRef idx="2">
-            <a:schemeClr val="accent1"/>
-          </a:effectRef>
-          <a:fontRef idx="minor">
-            <a:schemeClr val="lt1"/>
-          </a:fontRef>
-        </p:style>
-        <p:txBody>
-          <a:bodyPr rtlCol="0" anchor="ctr"/>
-          <a:lstStyle/>
-          <a:p>
-            <a:pPr algn="ctr"/>
-          </a:p>
-        </p:txBody>
-      </p:sp>
-      <p:sp>
-        <p:nvSpPr>
-          <p:cNvPr id="3" name="TextBox 2"/>
-          <p:cNvSpPr txBox="1"/>
-          <p:nvPr/>
-        </p:nvSpPr>
-        <p:spPr>
-          <a:xfrm>
-            <a:off x="1143000" y="393192"/>
-            <a:ext cx="8229600" cy="274320"/>
-          </a:xfrm>
-          <a:prstGeom prst="rect">
-            <a:avLst/>
-          </a:prstGeom>
-          <a:noFill/>
-        </p:spPr>
-        <p:txBody>
-          <a:bodyPr wrap="square" anchor="t" lIns="0" rIns="0" tIns="0" bIns="0">
-            <a:spAutoFit/>
-          </a:bodyPr>
-          <a:lstStyle/>
-          <a:p>
-            <a:pPr algn="l">
-              <a:spcAft>
-                <a:spcPts val="540"/>
-              </a:spcAft>
-            </a:pPr>
-            <a:r>
-              <a:rPr sz="1200" b="1" i="0">
-                <a:solidFill>
-                  <a:srgbClr val="5D5A54"/>
-                </a:solidFill>
-                <a:latin typeface="Inter Tight"/>
-              </a:rPr>
               <a:t>ONE THING TO TRY</a:t>
             </a:r>
           </a:p>
@@ -8631,7 +8185,7 @@
                 </a:solidFill>
                 <a:latin typeface="Source Serif 4"/>
               </a:rPr>
-              <a:t>Something heavy in advisory gets the same response as anywhere else: thank them, keep it short in the group, check in after, and walk them to a counselor that day. Practice it once in the role cards so it isn't new when it happens.</a:t>
+              <a:t>Something heavy in advisory gets the same response as anywhere else: thank them, keep it short in the group, check in after, and walk them to a counselor that day. Talking it through once in a scenario means it isn't new when it happens.</a:t>
             </a:r>
           </a:p>
           <a:p>
